--- a/RAG_Docs/Presentation_RAG_chatbot.pptx
+++ b/RAG_Docs/Presentation_RAG_chatbot.pptx
@@ -29931,11 +29931,21 @@
             </a:pPr>
             <a:r>
               <a:rPr lang="en-IN" dirty="0"/>
-              <a:t>Full detailed project report on </a:t>
+              <a:t>Full detailed project </a:t>
             </a:r>
             <a:r>
               <a:rPr lang="en-IN" dirty="0">
                 <a:hlinkClick r:id="rId3"/>
+              </a:rPr>
+              <a:t>report</a:t>
+            </a:r>
+            <a:r>
+              <a:rPr lang="en-IN" dirty="0"/>
+              <a:t> on </a:t>
+            </a:r>
+            <a:r>
+              <a:rPr lang="en-IN" dirty="0">
+                <a:hlinkClick r:id="rId4"/>
               </a:rPr>
               <a:t>GitHub</a:t>
             </a:r>
